--- a/hernandez-law/Hernandez_Law_August 14, 2026_Proposal.pptx
+++ b/hernandez-law/Hernandez_Law_August 14, 2026_Proposal.pptx
@@ -3105,7 +3105,7 @@
             <a:avLst/>
           </a:prstGeom>
           <a:solidFill>
-            <a:srgbClr val="0D1F3C"/>
+            <a:srgbClr val="003A59"/>
           </a:solidFill>
           <a:ln>
             <a:solidFill>
@@ -3159,9 +3159,9 @@
             <a:r>
               <a:rPr sz="800" b="1" i="0">
                 <a:solidFill>
-                  <a:srgbClr val="F5C400"/>
-                </a:solidFill>
-                <a:latin typeface="Calibri"/>
+                  <a:srgbClr val="69CD2B"/>
+                </a:solidFill>
+                <a:latin typeface="Poppins"/>
               </a:rPr>
               <a:t>LAW FIRM GROWTH AUDIT  ·  HERNANDEZ LAW</a:t>
             </a:r>
@@ -3194,7 +3194,7 @@
                 <a:solidFill>
                   <a:srgbClr val="FFFFFF"/>
                 </a:solidFill>
-                <a:latin typeface="Calibri"/>
+                <a:latin typeface="Poppins"/>
               </a:rPr>
               <a:t>Where Hernandez Law Stands Today</a:t>
             </a:r>
@@ -3216,7 +3216,7 @@
             <a:avLst/>
           </a:prstGeom>
           <a:solidFill>
-            <a:srgbClr val="F5C400"/>
+            <a:srgbClr val="0091C9"/>
           </a:solidFill>
           <a:ln>
             <a:solidFill>
@@ -3317,7 +3317,7 @@
                 <a:solidFill>
                   <a:srgbClr val="FFFFFF"/>
                 </a:solidFill>
-                <a:latin typeface="Calibri"/>
+                <a:latin typeface="Poppins"/>
               </a:rPr>
               <a:t>8</a:t>
             </a:r>
@@ -3350,7 +3350,7 @@
                 <a:solidFill>
                   <a:srgbClr val="FFFFFF"/>
                 </a:solidFill>
-                <a:latin typeface="Calibri"/>
+                <a:latin typeface="Poppins"/>
               </a:rPr>
               <a:t>COMPETITIVE URGENCY</a:t>
             </a:r>
@@ -3417,7 +3417,7 @@
             <a:avLst/>
           </a:prstGeom>
           <a:solidFill>
-            <a:srgbClr val="162947"/>
+            <a:srgbClr val="265872"/>
           </a:solidFill>
           <a:ln>
             <a:solidFill>
@@ -3473,7 +3473,7 @@
                 <a:solidFill>
                   <a:srgbClr val="FFFFFF"/>
                 </a:solidFill>
-                <a:latin typeface="Calibri"/>
+                <a:latin typeface="Poppins"/>
               </a:rPr>
               <a:t>Lead Generation</a:t>
             </a:r>
@@ -3506,7 +3506,7 @@
                 <a:solidFill>
                   <a:srgbClr val="D97706"/>
                 </a:solidFill>
-                <a:latin typeface="Calibri"/>
+                <a:latin typeface="Poppins"/>
               </a:rPr>
               <a:t>AMBER</a:t>
             </a:r>
@@ -3539,7 +3539,7 @@
                 <a:solidFill>
                   <a:srgbClr val="8BADD0"/>
                 </a:solidFill>
-                <a:latin typeface="Calibri"/>
+                <a:latin typeface="Poppins"/>
               </a:rPr>
               <a:t>Referral network slowing</a:t>
             </a:r>
@@ -3606,7 +3606,7 @@
             <a:avLst/>
           </a:prstGeom>
           <a:solidFill>
-            <a:srgbClr val="162947"/>
+            <a:srgbClr val="265872"/>
           </a:solidFill>
           <a:ln>
             <a:solidFill>
@@ -3662,7 +3662,7 @@
                 <a:solidFill>
                   <a:srgbClr val="FFFFFF"/>
                 </a:solidFill>
-                <a:latin typeface="Calibri"/>
+                <a:latin typeface="Poppins"/>
               </a:rPr>
               <a:t>Intake</a:t>
             </a:r>
@@ -3695,7 +3695,7 @@
                 <a:solidFill>
                   <a:srgbClr val="C0392B"/>
                 </a:solidFill>
-                <a:latin typeface="Calibri"/>
+                <a:latin typeface="Poppins"/>
               </a:rPr>
               <a:t>CRITICAL</a:t>
             </a:r>
@@ -3728,7 +3728,7 @@
                 <a:solidFill>
                   <a:srgbClr val="8BADD0"/>
                 </a:solidFill>
-                <a:latin typeface="Calibri"/>
+                <a:latin typeface="Poppins"/>
               </a:rPr>
               <a:t>Owner handles most intake</a:t>
             </a:r>
@@ -3795,7 +3795,7 @@
             <a:avLst/>
           </a:prstGeom>
           <a:solidFill>
-            <a:srgbClr val="162947"/>
+            <a:srgbClr val="265872"/>
           </a:solidFill>
           <a:ln>
             <a:solidFill>
@@ -3851,7 +3851,7 @@
                 <a:solidFill>
                   <a:srgbClr val="FFFFFF"/>
                 </a:solidFill>
-                <a:latin typeface="Calibri"/>
+                <a:latin typeface="Poppins"/>
               </a:rPr>
               <a:t>Team</a:t>
             </a:r>
@@ -3884,7 +3884,7 @@
                 <a:solidFill>
                   <a:srgbClr val="D97706"/>
                 </a:solidFill>
-                <a:latin typeface="Calibri"/>
+                <a:latin typeface="Poppins"/>
               </a:rPr>
               <a:t>AMBER</a:t>
             </a:r>
@@ -3917,7 +3917,7 @@
                 <a:solidFill>
                   <a:srgbClr val="8BADD0"/>
                 </a:solidFill>
-                <a:latin typeface="Calibri"/>
+                <a:latin typeface="Poppins"/>
               </a:rPr>
               <a:t>Everything routes to owner</a:t>
             </a:r>
@@ -3984,7 +3984,7 @@
             <a:avLst/>
           </a:prstGeom>
           <a:solidFill>
-            <a:srgbClr val="162947"/>
+            <a:srgbClr val="265872"/>
           </a:solidFill>
           <a:ln>
             <a:solidFill>
@@ -4040,7 +4040,7 @@
                 <a:solidFill>
                   <a:srgbClr val="FFFFFF"/>
                 </a:solidFill>
-                <a:latin typeface="Calibri"/>
+                <a:latin typeface="Poppins"/>
               </a:rPr>
               <a:t>Profit Plan</a:t>
             </a:r>
@@ -4073,7 +4073,7 @@
                 <a:solidFill>
                   <a:srgbClr val="D97706"/>
                 </a:solidFill>
-                <a:latin typeface="Calibri"/>
+                <a:latin typeface="Poppins"/>
               </a:rPr>
               <a:t>AMBER</a:t>
             </a:r>
@@ -4106,7 +4106,7 @@
                 <a:solidFill>
                   <a:srgbClr val="8BADD0"/>
                 </a:solidFill>
-                <a:latin typeface="Calibri"/>
+                <a:latin typeface="Poppins"/>
               </a:rPr>
               <a:t>No margin visibility</a:t>
             </a:r>
@@ -4137,9 +4137,9 @@
             <a:r>
               <a:rPr sz="800" b="1" i="0">
                 <a:solidFill>
-                  <a:srgbClr val="F5C400"/>
-                </a:solidFill>
-                <a:latin typeface="Calibri"/>
+                  <a:srgbClr val="69CD2B"/>
+                </a:solidFill>
+                <a:latin typeface="Poppins"/>
               </a:rPr>
               <a:t>KEY FINDINGS</a:t>
             </a:r>
@@ -4262,7 +4262,7 @@
                 <a:solidFill>
                   <a:srgbClr val="FFFFFF"/>
                 </a:solidFill>
-                <a:latin typeface="Calibri"/>
+                <a:latin typeface="Poppins"/>
               </a:rPr>
               <a:t>✕</a:t>
             </a:r>
@@ -4295,7 +4295,7 @@
                 <a:solidFill>
                   <a:srgbClr val="F0BABA"/>
                 </a:solidFill>
-                <a:latin typeface="Calibri"/>
+                <a:latin typeface="Poppins"/>
               </a:rPr>
               <a:t>Revenue declining to ~$500K in 2026 vs. ~$1M in prior years</a:t>
             </a:r>
@@ -4418,7 +4418,7 @@
                 <a:solidFill>
                   <a:srgbClr val="FFFFFF"/>
                 </a:solidFill>
-                <a:latin typeface="Calibri"/>
+                <a:latin typeface="Poppins"/>
               </a:rPr>
               <a:t>✕</a:t>
             </a:r>
@@ -4451,7 +4451,7 @@
                 <a:solidFill>
                   <a:srgbClr val="F0BABA"/>
                 </a:solidFill>
-                <a:latin typeface="Calibri"/>
+                <a:latin typeface="Poppins"/>
               </a:rPr>
               <a:t>GBP category/address mismatch hides firm from local search</a:t>
             </a:r>
@@ -4574,7 +4574,7 @@
                 <a:solidFill>
                   <a:srgbClr val="FFFFFF"/>
                 </a:solidFill>
-                <a:latin typeface="Calibri"/>
+                <a:latin typeface="Poppins"/>
               </a:rPr>
               <a:t>✕</a:t>
             </a:r>
@@ -4607,7 +4607,7 @@
                 <a:solidFill>
                   <a:srgbClr val="F0BABA"/>
                 </a:solidFill>
-                <a:latin typeface="Calibri"/>
+                <a:latin typeface="Poppins"/>
               </a:rPr>
               <a:t>Intake bottlenecks through Tatiana during litigation weeks</a:t>
             </a:r>
@@ -4730,7 +4730,7 @@
                 <a:solidFill>
                   <a:srgbClr val="FFFFFF"/>
                 </a:solidFill>
-                <a:latin typeface="Calibri"/>
+                <a:latin typeface="Poppins"/>
               </a:rPr>
               <a:t>✓</a:t>
             </a:r>
@@ -4763,7 +4763,7 @@
                 <a:solidFill>
                   <a:srgbClr val="86EFAC"/>
                 </a:solidFill>
-                <a:latin typeface="Calibri"/>
+                <a:latin typeface="Poppins"/>
               </a:rPr>
               <a:t>Growing team of 2 staff, a law clerk, and a contract attorney</a:t>
             </a:r>
@@ -4830,7 +4830,7 @@
             <a:avLst/>
           </a:prstGeom>
           <a:solidFill>
-            <a:srgbClr val="0D1F3C"/>
+            <a:srgbClr val="003A59"/>
           </a:solidFill>
           <a:ln>
             <a:solidFill>
@@ -4875,7 +4875,7 @@
             <a:avLst/>
           </a:prstGeom>
           <a:solidFill>
-            <a:srgbClr val="F5C400"/>
+            <a:srgbClr val="0091C9"/>
           </a:solidFill>
           <a:ln>
             <a:solidFill>
@@ -4929,9 +4929,9 @@
             <a:r>
               <a:rPr sz="800" b="1" i="0">
                 <a:solidFill>
-                  <a:srgbClr val="F5C400"/>
-                </a:solidFill>
-                <a:latin typeface="Calibri"/>
+                  <a:srgbClr val="69CD2B"/>
+                </a:solidFill>
+                <a:latin typeface="Poppins"/>
               </a:rPr>
               <a:t>YOU ARE HERE</a:t>
             </a:r>
@@ -4964,7 +4964,7 @@
                 <a:solidFill>
                   <a:srgbClr val="FFFFFF"/>
                 </a:solidFill>
-                <a:latin typeface="Calibri"/>
+                <a:latin typeface="Poppins"/>
               </a:rPr>
               <a:t>Stage: Owner Runs Everything  →  Goal: A Firm That Runs Itself</a:t>
             </a:r>
@@ -4997,7 +4997,7 @@
                 <a:solidFill>
                   <a:srgbClr val="64748B"/>
                 </a:solidFill>
-                <a:latin typeface="Calibri"/>
+                <a:latin typeface="Poppins"/>
               </a:rPr>
               <a:t>COMPETITOR LANDSCAPE</a:t>
             </a:r>
@@ -5075,7 +5075,7 @@
                 <a:solidFill>
                   <a:srgbClr val="1E293B"/>
                 </a:solidFill>
-                <a:latin typeface="Calibri"/>
+                <a:latin typeface="Poppins"/>
               </a:rPr>
               <a:t>Setareh Law Group</a:t>
             </a:r>
@@ -5108,7 +5108,7 @@
                 <a:solidFill>
                   <a:srgbClr val="16A34A"/>
                 </a:solidFill>
-                <a:latin typeface="Calibri"/>
+                <a:latin typeface="Poppins"/>
               </a:rPr>
               <a:t>17 reviews</a:t>
             </a:r>
@@ -5141,7 +5141,7 @@
                 <a:solidFill>
                   <a:srgbClr val="64748B"/>
                 </a:solidFill>
-                <a:latin typeface="Calibri"/>
+                <a:latin typeface="Poppins"/>
               </a:rPr>
               <a:t>25+ yrs · $1B+ recovered</a:t>
             </a:r>
@@ -5219,7 +5219,7 @@
                 <a:solidFill>
                   <a:srgbClr val="1E293B"/>
                 </a:solidFill>
-                <a:latin typeface="Calibri"/>
+                <a:latin typeface="Poppins"/>
               </a:rPr>
               <a:t>Matern Law Group</a:t>
             </a:r>
@@ -5252,7 +5252,7 @@
                 <a:solidFill>
                   <a:srgbClr val="16A34A"/>
                 </a:solidFill>
-                <a:latin typeface="Calibri"/>
+                <a:latin typeface="Poppins"/>
               </a:rPr>
               <a:t>19 reviews</a:t>
             </a:r>
@@ -5285,7 +5285,7 @@
                 <a:solidFill>
                   <a:srgbClr val="64748B"/>
                 </a:solidFill>
-                <a:latin typeface="Calibri"/>
+                <a:latin typeface="Poppins"/>
               </a:rPr>
               <a:t>Strong intake reputation</a:t>
             </a:r>
@@ -5363,7 +5363,7 @@
                 <a:solidFill>
                   <a:srgbClr val="1E293B"/>
                 </a:solidFill>
-                <a:latin typeface="Calibri"/>
+                <a:latin typeface="Poppins"/>
               </a:rPr>
               <a:t>Blady Workforce Law Group</a:t>
             </a:r>
@@ -5396,7 +5396,7 @@
                 <a:solidFill>
                   <a:srgbClr val="16A34A"/>
                 </a:solidFill>
-                <a:latin typeface="Calibri"/>
+                <a:latin typeface="Poppins"/>
               </a:rPr>
               <a:t>17 reviews</a:t>
             </a:r>
@@ -5429,7 +5429,7 @@
                 <a:solidFill>
                   <a:srgbClr val="64748B"/>
                 </a:solidFill>
-                <a:latin typeface="Calibri"/>
+                <a:latin typeface="Poppins"/>
               </a:rPr>
               <a:t>AV-rated · LA-based</a:t>
             </a:r>
@@ -5552,7 +5552,7 @@
                 <a:solidFill>
                   <a:srgbClr val="C0392B"/>
                 </a:solidFill>
-                <a:latin typeface="Calibri"/>
+                <a:latin typeface="Poppins"/>
               </a:rPr>
               <a:t>Hernandez Law</a:t>
             </a:r>
@@ -5585,7 +5585,7 @@
                 <a:solidFill>
                   <a:srgbClr val="C0392B"/>
                 </a:solidFill>
-                <a:latin typeface="Calibri"/>
+                <a:latin typeface="Poppins"/>
               </a:rPr>
               <a:t>0 reviews</a:t>
             </a:r>
@@ -5618,7 +5618,7 @@
                 <a:solidFill>
                   <a:srgbClr val="64748B"/>
                 </a:solidFill>
-                <a:latin typeface="Calibri"/>
+                <a:latin typeface="Poppins"/>
               </a:rPr>
               <a:t>← You are here</a:t>
             </a:r>
@@ -5640,7 +5640,7 @@
             <a:avLst/>
           </a:prstGeom>
           <a:solidFill>
-            <a:srgbClr val="0D1F3C"/>
+            <a:srgbClr val="003A59"/>
           </a:solidFill>
           <a:ln>
             <a:solidFill>
@@ -5670,9 +5670,33 @@
           </a:p>
         </p:txBody>
       </p:sp>
-      <p:sp>
-        <p:nvSpPr>
-          <p:cNvPr id="70" name="TextBox 69"/>
+      <p:pic>
+        <p:nvPicPr>
+          <p:cNvPr id="70" name="Picture 69" descr="smb_team_logo.png"/>
+          <p:cNvPicPr>
+            <a:picLocks noChangeAspect="1"/>
+          </p:cNvPicPr>
+          <p:nvPr/>
+        </p:nvPicPr>
+        <p:blipFill>
+          <a:blip r:embed="rId2"/>
+          <a:stretch>
+            <a:fillRect/>
+          </a:stretch>
+        </p:blipFill>
+        <p:spPr>
+          <a:xfrm>
+            <a:off x="201168" y="4837176"/>
+            <a:ext cx="1170432" cy="237744"/>
+          </a:xfrm>
+          <a:prstGeom prst="rect">
+            <a:avLst/>
+          </a:prstGeom>
+        </p:spPr>
+      </p:pic>
+      <p:sp>
+        <p:nvSpPr>
+          <p:cNvPr id="71" name="TextBox 70"/>
           <p:cNvSpPr txBox="1"/>
           <p:nvPr/>
         </p:nvSpPr>
@@ -5696,7 +5720,7 @@
                 <a:solidFill>
                   <a:srgbClr val="5A7A9A"/>
                 </a:solidFill>
-                <a:latin typeface="Calibri"/>
+                <a:latin typeface="Poppins"/>
               </a:rPr>
               <a:t>CONFIDENTIAL  ·  Prepared by Dan Bryant | SMB Team</a:t>
             </a:r>
@@ -5705,7 +5729,7 @@
       </p:sp>
       <p:sp>
         <p:nvSpPr>
-          <p:cNvPr id="71" name="TextBox 70"/>
+          <p:cNvPr id="72" name="TextBox 71"/>
           <p:cNvSpPr txBox="1"/>
           <p:nvPr/>
         </p:nvSpPr>
@@ -5729,7 +5753,7 @@
                 <a:solidFill>
                   <a:srgbClr val="5A7A9A"/>
                 </a:solidFill>
-                <a:latin typeface="Calibri"/>
+                <a:latin typeface="Poppins"/>
               </a:rPr>
               <a:t>1 / 3</a:t>
             </a:r>
@@ -5769,7 +5793,7 @@
             <a:avLst/>
           </a:prstGeom>
           <a:solidFill>
-            <a:srgbClr val="0D1F3C"/>
+            <a:srgbClr val="003A59"/>
           </a:solidFill>
           <a:ln>
             <a:solidFill>
@@ -5823,9 +5847,9 @@
             <a:r>
               <a:rPr sz="800" b="1" i="0">
                 <a:solidFill>
-                  <a:srgbClr val="F5C400"/>
-                </a:solidFill>
-                <a:latin typeface="Calibri"/>
+                  <a:srgbClr val="69CD2B"/>
+                </a:solidFill>
+                <a:latin typeface="Poppins"/>
               </a:rPr>
               <a:t>LAW FIRM GROWTH AUDIT  ·  HERNANDEZ LAW</a:t>
             </a:r>
@@ -5858,7 +5882,7 @@
                 <a:solidFill>
                   <a:srgbClr val="FFFFFF"/>
                 </a:solidFill>
-                <a:latin typeface="Calibri"/>
+                <a:latin typeface="Poppins"/>
               </a:rPr>
               <a:t>Your Growth Plan: 3 Priorities to Reach 5+ Cases a Month</a:t>
             </a:r>
@@ -5880,7 +5904,7 @@
             <a:avLst/>
           </a:prstGeom>
           <a:solidFill>
-            <a:srgbClr val="0D1F3C"/>
+            <a:srgbClr val="003A59"/>
           </a:solidFill>
           <a:ln>
             <a:solidFill>
@@ -5925,7 +5949,7 @@
             <a:avLst/>
           </a:prstGeom>
           <a:solidFill>
-            <a:srgbClr val="F5C400"/>
+            <a:srgbClr val="0091C9"/>
           </a:solidFill>
           <a:ln>
             <a:solidFill>
@@ -5979,9 +6003,9 @@
             <a:r>
               <a:rPr sz="800" b="1" i="0">
                 <a:solidFill>
-                  <a:srgbClr val="F5C400"/>
-                </a:solidFill>
-                <a:latin typeface="Calibri"/>
+                  <a:srgbClr val="69CD2B"/>
+                </a:solidFill>
+                <a:latin typeface="Poppins"/>
               </a:rPr>
               <a:t>THE SMB TEAM MODEL</a:t>
             </a:r>
@@ -6014,7 +6038,7 @@
                 <a:solidFill>
                   <a:srgbClr val="A8BFDA"/>
                 </a:solidFill>
-                <a:latin typeface="Calibri"/>
+                <a:latin typeface="Poppins"/>
               </a:rPr>
               <a:t>All four pillars — Marketing, Intake, Team, and Profit — must work together. When all four pillars work, Tatiana can finally step away from the intake pile and trust the firm still runs.</a:t>
             </a:r>
@@ -6036,7 +6060,7 @@
             <a:avLst/>
           </a:prstGeom>
           <a:solidFill>
-            <a:srgbClr val="F5C400"/>
+            <a:srgbClr val="69CD2B"/>
           </a:solidFill>
           <a:ln>
             <a:solidFill>
@@ -6090,9 +6114,9 @@
             <a:r>
               <a:rPr sz="1200" b="1" i="0">
                 <a:solidFill>
-                  <a:srgbClr val="0D1F3C"/>
-                </a:solidFill>
-                <a:latin typeface="Calibri"/>
+                  <a:srgbClr val="003A59"/>
+                </a:solidFill>
+                <a:latin typeface="Poppins"/>
               </a:rPr>
               <a:t>~$500K → 5+ cases/mo</a:t>
             </a:r>
@@ -6123,9 +6147,9 @@
             <a:r>
               <a:rPr sz="900" b="0" i="0">
                 <a:solidFill>
-                  <a:srgbClr val="0D1F3C"/>
-                </a:solidFill>
-                <a:latin typeface="Calibri"/>
+                  <a:srgbClr val="003A59"/>
+                </a:solidFill>
+                <a:latin typeface="Poppins"/>
               </a:rPr>
               <a:t>Step away from intake and trust the firm runs</a:t>
             </a:r>
@@ -6147,7 +6171,7 @@
             <a:avLst/>
           </a:prstGeom>
           <a:solidFill>
-            <a:srgbClr val="1D4ED8"/>
+            <a:srgbClr val="0091C9"/>
           </a:solidFill>
           <a:ln>
             <a:solidFill>
@@ -6203,7 +6227,7 @@
                 <a:solidFill>
                   <a:srgbClr val="FFFFFF"/>
                 </a:solidFill>
-                <a:latin typeface="Calibri"/>
+                <a:latin typeface="Poppins"/>
               </a:rPr>
               <a:t>01</a:t>
             </a:r>
@@ -6236,7 +6260,7 @@
                 <a:solidFill>
                   <a:srgbClr val="FFFFFF"/>
                 </a:solidFill>
-                <a:latin typeface="Calibri"/>
+                <a:latin typeface="Poppins"/>
               </a:rPr>
               <a:t>Build the</a:t>
             </a:r>
@@ -6269,7 +6293,7 @@
                 <a:solidFill>
                   <a:srgbClr val="FFFFFF"/>
                 </a:solidFill>
-                <a:latin typeface="Calibri"/>
+                <a:latin typeface="Poppins"/>
               </a:rPr>
               <a:t>Marketing Engine</a:t>
             </a:r>
@@ -6291,7 +6315,7 @@
             <a:avLst/>
           </a:prstGeom>
           <a:solidFill>
-            <a:srgbClr val="EFF6FF"/>
+            <a:srgbClr val="E3F4FA"/>
           </a:solidFill>
           <a:ln>
             <a:solidFill>
@@ -6336,7 +6360,7 @@
             <a:avLst/>
           </a:prstGeom>
           <a:solidFill>
-            <a:srgbClr val="1D4ED8"/>
+            <a:srgbClr val="0091C9"/>
           </a:solidFill>
           <a:ln>
             <a:solidFill>
@@ -6392,7 +6416,7 @@
                 <a:solidFill>
                   <a:srgbClr val="1E293B"/>
                 </a:solidFill>
-                <a:latin typeface="Calibri"/>
+                <a:latin typeface="Poppins"/>
               </a:rPr>
               <a:t>Fix GBP category &amp; address for local visibility</a:t>
             </a:r>
@@ -6459,7 +6483,7 @@
             <a:avLst/>
           </a:prstGeom>
           <a:solidFill>
-            <a:srgbClr val="1D4ED8"/>
+            <a:srgbClr val="0091C9"/>
           </a:solidFill>
           <a:ln>
             <a:solidFill>
@@ -6515,7 +6539,7 @@
                 <a:solidFill>
                   <a:srgbClr val="1E293B"/>
                 </a:solidFill>
-                <a:latin typeface="Calibri"/>
+                <a:latin typeface="Poppins"/>
               </a:rPr>
               <a:t>Consolidate EN/ES sites into one bilingual asset</a:t>
             </a:r>
@@ -6537,7 +6561,7 @@
             <a:avLst/>
           </a:prstGeom>
           <a:solidFill>
-            <a:srgbClr val="EFF6FF"/>
+            <a:srgbClr val="E3F4FA"/>
           </a:solidFill>
           <a:ln>
             <a:solidFill>
@@ -6582,7 +6606,7 @@
             <a:avLst/>
           </a:prstGeom>
           <a:solidFill>
-            <a:srgbClr val="1D4ED8"/>
+            <a:srgbClr val="0091C9"/>
           </a:solidFill>
           <a:ln>
             <a:solidFill>
@@ -6638,7 +6662,7 @@
                 <a:solidFill>
                   <a:srgbClr val="1E293B"/>
                 </a:solidFill>
-                <a:latin typeface="Calibri"/>
+                <a:latin typeface="Poppins"/>
               </a:rPr>
               <a:t>Launch English-language Google Ads campaigns</a:t>
             </a:r>
@@ -6705,7 +6729,7 @@
             <a:avLst/>
           </a:prstGeom>
           <a:solidFill>
-            <a:srgbClr val="1D4ED8"/>
+            <a:srgbClr val="0091C9"/>
           </a:solidFill>
           <a:ln>
             <a:solidFill>
@@ -6761,7 +6785,7 @@
                 <a:solidFill>
                   <a:srgbClr val="1E293B"/>
                 </a:solidFill>
-                <a:latin typeface="Calibri"/>
+                <a:latin typeface="Poppins"/>
               </a:rPr>
               <a:t>Build reviews so prospects trust you, not just referrals</a:t>
             </a:r>
@@ -6783,7 +6807,7 @@
             <a:avLst/>
           </a:prstGeom>
           <a:solidFill>
-            <a:srgbClr val="EFF6FF"/>
+            <a:srgbClr val="E3F4FA"/>
           </a:solidFill>
           <a:ln>
             <a:solidFill>
@@ -6828,7 +6852,7 @@
             <a:avLst/>
           </a:prstGeom>
           <a:solidFill>
-            <a:srgbClr val="1D4ED8"/>
+            <a:srgbClr val="0091C9"/>
           </a:solidFill>
           <a:ln>
             <a:solidFill>
@@ -6884,7 +6908,7 @@
                 <a:solidFill>
                   <a:srgbClr val="1E293B"/>
                 </a:solidFill>
-                <a:latin typeface="Calibri"/>
+                <a:latin typeface="Poppins"/>
               </a:rPr>
               <a:t>Turn Google into a case pipeline that runs without you</a:t>
             </a:r>
@@ -6906,7 +6930,7 @@
             <a:avLst/>
           </a:prstGeom>
           <a:solidFill>
-            <a:srgbClr val="0F766E"/>
+            <a:srgbClr val="69CD2B"/>
           </a:solidFill>
           <a:ln>
             <a:solidFill>
@@ -6960,9 +6984,9 @@
             <a:r>
               <a:rPr sz="1000" b="1" i="0">
                 <a:solidFill>
-                  <a:srgbClr val="FFFFFF"/>
-                </a:solidFill>
-                <a:latin typeface="Calibri"/>
+                  <a:srgbClr val="003A59"/>
+                </a:solidFill>
+                <a:latin typeface="Poppins"/>
               </a:rPr>
               <a:t>02</a:t>
             </a:r>
@@ -6993,9 +7017,9 @@
             <a:r>
               <a:rPr sz="1200" b="1" i="0">
                 <a:solidFill>
-                  <a:srgbClr val="FFFFFF"/>
-                </a:solidFill>
-                <a:latin typeface="Calibri"/>
+                  <a:srgbClr val="003A59"/>
+                </a:solidFill>
+                <a:latin typeface="Poppins"/>
               </a:rPr>
               <a:t>Fix Intake &amp;</a:t>
             </a:r>
@@ -7026,9 +7050,9 @@
             <a:r>
               <a:rPr sz="1200" b="1" i="0">
                 <a:solidFill>
-                  <a:srgbClr val="FFFFFF"/>
-                </a:solidFill>
-                <a:latin typeface="Calibri"/>
+                  <a:srgbClr val="003A59"/>
+                </a:solidFill>
+                <a:latin typeface="Poppins"/>
               </a:rPr>
               <a:t>Stop Losing Cases</a:t>
             </a:r>
@@ -7050,7 +7074,7 @@
             <a:avLst/>
           </a:prstGeom>
           <a:solidFill>
-            <a:srgbClr val="F0FDFA"/>
+            <a:srgbClr val="EDF9E6"/>
           </a:solidFill>
           <a:ln>
             <a:solidFill>
@@ -7095,7 +7119,7 @@
             <a:avLst/>
           </a:prstGeom>
           <a:solidFill>
-            <a:srgbClr val="0F766E"/>
+            <a:srgbClr val="69CD2B"/>
           </a:solidFill>
           <a:ln>
             <a:solidFill>
@@ -7151,7 +7175,7 @@
                 <a:solidFill>
                   <a:srgbClr val="1E293B"/>
                 </a:solidFill>
-                <a:latin typeface="Calibri"/>
+                <a:latin typeface="Poppins"/>
               </a:rPr>
               <a:t>Move the consultation form above the fold</a:t>
             </a:r>
@@ -7218,7 +7242,7 @@
             <a:avLst/>
           </a:prstGeom>
           <a:solidFill>
-            <a:srgbClr val="0F766E"/>
+            <a:srgbClr val="69CD2B"/>
           </a:solidFill>
           <a:ln>
             <a:solidFill>
@@ -7274,7 +7298,7 @@
                 <a:solidFill>
                   <a:srgbClr val="1E293B"/>
                 </a:solidFill>
-                <a:latin typeface="Calibri"/>
+                <a:latin typeface="Poppins"/>
               </a:rPr>
               <a:t>Add coverage so leads aren't missed after hours</a:t>
             </a:r>
@@ -7296,7 +7320,7 @@
             <a:avLst/>
           </a:prstGeom>
           <a:solidFill>
-            <a:srgbClr val="F0FDFA"/>
+            <a:srgbClr val="EDF9E6"/>
           </a:solidFill>
           <a:ln>
             <a:solidFill>
@@ -7341,7 +7365,7 @@
             <a:avLst/>
           </a:prstGeom>
           <a:solidFill>
-            <a:srgbClr val="0F766E"/>
+            <a:srgbClr val="69CD2B"/>
           </a:solidFill>
           <a:ln>
             <a:solidFill>
@@ -7397,7 +7421,7 @@
                 <a:solidFill>
                   <a:srgbClr val="1E293B"/>
                 </a:solidFill>
-                <a:latin typeface="Calibri"/>
+                <a:latin typeface="Poppins"/>
               </a:rPr>
               <a:t>Build a follow-up sequence for slower responders</a:t>
             </a:r>
@@ -7464,7 +7488,7 @@
             <a:avLst/>
           </a:prstGeom>
           <a:solidFill>
-            <a:srgbClr val="0F766E"/>
+            <a:srgbClr val="69CD2B"/>
           </a:solidFill>
           <a:ln>
             <a:solidFill>
@@ -7520,7 +7544,7 @@
                 <a:solidFill>
                   <a:srgbClr val="1E293B"/>
                 </a:solidFill>
-                <a:latin typeface="Calibri"/>
+                <a:latin typeface="Poppins"/>
               </a:rPr>
               <a:t>Reduce delays during your busiest litigation weeks</a:t>
             </a:r>
@@ -7542,7 +7566,7 @@
             <a:avLst/>
           </a:prstGeom>
           <a:solidFill>
-            <a:srgbClr val="F0FDFA"/>
+            <a:srgbClr val="EDF9E6"/>
           </a:solidFill>
           <a:ln>
             <a:solidFill>
@@ -7587,7 +7611,7 @@
             <a:avLst/>
           </a:prstGeom>
           <a:solidFill>
-            <a:srgbClr val="0F766E"/>
+            <a:srgbClr val="69CD2B"/>
           </a:solidFill>
           <a:ln>
             <a:solidFill>
@@ -7643,7 +7667,7 @@
                 <a:solidFill>
                   <a:srgbClr val="1E293B"/>
                 </a:solidFill>
-                <a:latin typeface="Calibri"/>
+                <a:latin typeface="Poppins"/>
               </a:rPr>
               <a:t>Let cases come in without routing through you first</a:t>
             </a:r>
@@ -7665,7 +7689,7 @@
             <a:avLst/>
           </a:prstGeom>
           <a:solidFill>
-            <a:srgbClr val="6D28D9"/>
+            <a:srgbClr val="003A59"/>
           </a:solidFill>
           <a:ln>
             <a:solidFill>
@@ -7721,7 +7745,7 @@
                 <a:solidFill>
                   <a:srgbClr val="FFFFFF"/>
                 </a:solidFill>
-                <a:latin typeface="Calibri"/>
+                <a:latin typeface="Poppins"/>
               </a:rPr>
               <a:t>03</a:t>
             </a:r>
@@ -7754,7 +7778,7 @@
                 <a:solidFill>
                   <a:srgbClr val="FFFFFF"/>
                 </a:solidFill>
-                <a:latin typeface="Calibri"/>
+                <a:latin typeface="Poppins"/>
               </a:rPr>
               <a:t>Install Team &amp;</a:t>
             </a:r>
@@ -7787,7 +7811,7 @@
                 <a:solidFill>
                   <a:srgbClr val="FFFFFF"/>
                 </a:solidFill>
-                <a:latin typeface="Calibri"/>
+                <a:latin typeface="Poppins"/>
               </a:rPr>
               <a:t>Profit Systems</a:t>
             </a:r>
@@ -7809,7 +7833,7 @@
             <a:avLst/>
           </a:prstGeom>
           <a:solidFill>
-            <a:srgbClr val="F5F3FF"/>
+            <a:srgbClr val="E0E7EB"/>
           </a:solidFill>
           <a:ln>
             <a:solidFill>
@@ -7854,7 +7878,7 @@
             <a:avLst/>
           </a:prstGeom>
           <a:solidFill>
-            <a:srgbClr val="6D28D9"/>
+            <a:srgbClr val="003A59"/>
           </a:solidFill>
           <a:ln>
             <a:solidFill>
@@ -7910,7 +7934,7 @@
                 <a:solidFill>
                   <a:srgbClr val="1E293B"/>
                 </a:solidFill>
-                <a:latin typeface="Calibri"/>
+                <a:latin typeface="Poppins"/>
               </a:rPr>
               <a:t>Define what your law clerk &amp; attorney own directly</a:t>
             </a:r>
@@ -7977,7 +8001,7 @@
             <a:avLst/>
           </a:prstGeom>
           <a:solidFill>
-            <a:srgbClr val="6D28D9"/>
+            <a:srgbClr val="003A59"/>
           </a:solidFill>
           <a:ln>
             <a:solidFill>
@@ -8033,7 +8057,7 @@
                 <a:solidFill>
                   <a:srgbClr val="1E293B"/>
                 </a:solidFill>
-                <a:latin typeface="Calibri"/>
+                <a:latin typeface="Poppins"/>
               </a:rPr>
               <a:t>Build margin visibility beyond the overhead number</a:t>
             </a:r>
@@ -8055,7 +8079,7 @@
             <a:avLst/>
           </a:prstGeom>
           <a:solidFill>
-            <a:srgbClr val="F5F3FF"/>
+            <a:srgbClr val="E0E7EB"/>
           </a:solidFill>
           <a:ln>
             <a:solidFill>
@@ -8100,7 +8124,7 @@
             <a:avLst/>
           </a:prstGeom>
           <a:solidFill>
-            <a:srgbClr val="6D28D9"/>
+            <a:srgbClr val="003A59"/>
           </a:solidFill>
           <a:ln>
             <a:solidFill>
@@ -8156,7 +8180,7 @@
                 <a:solidFill>
                   <a:srgbClr val="1E293B"/>
                 </a:solidFill>
-                <a:latin typeface="Calibri"/>
+                <a:latin typeface="Poppins"/>
               </a:rPr>
               <a:t>Confirm ad spend is still paying for itself</a:t>
             </a:r>
@@ -8223,7 +8247,7 @@
             <a:avLst/>
           </a:prstGeom>
           <a:solidFill>
-            <a:srgbClr val="6D28D9"/>
+            <a:srgbClr val="003A59"/>
           </a:solidFill>
           <a:ln>
             <a:solidFill>
@@ -8279,7 +8303,7 @@
                 <a:solidFill>
                   <a:srgbClr val="1E293B"/>
                 </a:solidFill>
-                <a:latin typeface="Calibri"/>
+                <a:latin typeface="Poppins"/>
               </a:rPr>
               <a:t>Set monthly reporting on lead source and conversion</a:t>
             </a:r>
@@ -8301,7 +8325,7 @@
             <a:avLst/>
           </a:prstGeom>
           <a:solidFill>
-            <a:srgbClr val="F5F3FF"/>
+            <a:srgbClr val="E0E7EB"/>
           </a:solidFill>
           <a:ln>
             <a:solidFill>
@@ -8346,7 +8370,7 @@
             <a:avLst/>
           </a:prstGeom>
           <a:solidFill>
-            <a:srgbClr val="6D28D9"/>
+            <a:srgbClr val="003A59"/>
           </a:solidFill>
           <a:ln>
             <a:solidFill>
@@ -8402,7 +8426,7 @@
                 <a:solidFill>
                   <a:srgbClr val="1E293B"/>
                 </a:solidFill>
-                <a:latin typeface="Calibri"/>
+                <a:latin typeface="Poppins"/>
               </a:rPr>
               <a:t>Give Tatiana back the bandwidth discovery weeks take</a:t>
             </a:r>
@@ -8424,7 +8448,7 @@
             <a:avLst/>
           </a:prstGeom>
           <a:solidFill>
-            <a:srgbClr val="0D1F3C"/>
+            <a:srgbClr val="003A59"/>
           </a:solidFill>
           <a:ln>
             <a:solidFill>
@@ -8454,9 +8478,33 @@
           </a:p>
         </p:txBody>
       </p:sp>
-      <p:sp>
-        <p:nvSpPr>
-          <p:cNvPr id="70" name="TextBox 69"/>
+      <p:pic>
+        <p:nvPicPr>
+          <p:cNvPr id="70" name="Picture 69" descr="smb_team_logo.png"/>
+          <p:cNvPicPr>
+            <a:picLocks noChangeAspect="1"/>
+          </p:cNvPicPr>
+          <p:nvPr/>
+        </p:nvPicPr>
+        <p:blipFill>
+          <a:blip r:embed="rId2"/>
+          <a:stretch>
+            <a:fillRect/>
+          </a:stretch>
+        </p:blipFill>
+        <p:spPr>
+          <a:xfrm>
+            <a:off x="201168" y="4837176"/>
+            <a:ext cx="1170432" cy="237744"/>
+          </a:xfrm>
+          <a:prstGeom prst="rect">
+            <a:avLst/>
+          </a:prstGeom>
+        </p:spPr>
+      </p:pic>
+      <p:sp>
+        <p:nvSpPr>
+          <p:cNvPr id="71" name="TextBox 70"/>
           <p:cNvSpPr txBox="1"/>
           <p:nvPr/>
         </p:nvSpPr>
@@ -8480,7 +8528,7 @@
                 <a:solidFill>
                   <a:srgbClr val="5A7A9A"/>
                 </a:solidFill>
-                <a:latin typeface="Calibri"/>
+                <a:latin typeface="Poppins"/>
               </a:rPr>
               <a:t>CONFIDENTIAL  ·  Prepared by Dan Bryant | SMB Team</a:t>
             </a:r>
@@ -8489,7 +8537,7 @@
       </p:sp>
       <p:sp>
         <p:nvSpPr>
-          <p:cNvPr id="71" name="TextBox 70"/>
+          <p:cNvPr id="72" name="TextBox 71"/>
           <p:cNvSpPr txBox="1"/>
           <p:nvPr/>
         </p:nvSpPr>
@@ -8513,7 +8561,7 @@
                 <a:solidFill>
                   <a:srgbClr val="5A7A9A"/>
                 </a:solidFill>
-                <a:latin typeface="Calibri"/>
+                <a:latin typeface="Poppins"/>
               </a:rPr>
               <a:t>2 / 3</a:t>
             </a:r>
@@ -8553,7 +8601,7 @@
             <a:avLst/>
           </a:prstGeom>
           <a:solidFill>
-            <a:srgbClr val="0D1F3C"/>
+            <a:srgbClr val="003A59"/>
           </a:solidFill>
           <a:ln>
             <a:solidFill>
@@ -8607,9 +8655,9 @@
             <a:r>
               <a:rPr sz="800" b="1" i="0">
                 <a:solidFill>
-                  <a:srgbClr val="F5C400"/>
-                </a:solidFill>
-                <a:latin typeface="Calibri"/>
+                  <a:srgbClr val="69CD2B"/>
+                </a:solidFill>
+                <a:latin typeface="Poppins"/>
               </a:rPr>
               <a:t>LAW FIRM GROWTH AUDIT  ·  HERNANDEZ LAW</a:t>
             </a:r>
@@ -8642,7 +8690,7 @@
                 <a:solidFill>
                   <a:srgbClr val="FFFFFF"/>
                 </a:solidFill>
-                <a:latin typeface="Calibri"/>
+                <a:latin typeface="Poppins"/>
               </a:rPr>
               <a:t>Your Investment &amp; What Happens Next</a:t>
             </a:r>
@@ -8709,7 +8757,7 @@
             <a:avLst/>
           </a:prstGeom>
           <a:solidFill>
-            <a:srgbClr val="1D4ED8"/>
+            <a:srgbClr val="0091C9"/>
           </a:solidFill>
           <a:ln>
             <a:solidFill>
@@ -8763,9 +8811,9 @@
             <a:r>
               <a:rPr sz="800" b="1" i="0">
                 <a:solidFill>
-                  <a:srgbClr val="1D4ED8"/>
-                </a:solidFill>
-                <a:latin typeface="Calibri"/>
+                  <a:srgbClr val="0091C9"/>
+                </a:solidFill>
+                <a:latin typeface="Poppins"/>
               </a:rPr>
               <a:t>FULL SERVICE MARKETING — ESSENTIALS</a:t>
             </a:r>
@@ -8796,9 +8844,9 @@
             <a:r>
               <a:rPr sz="3200" b="1" i="0">
                 <a:solidFill>
-                  <a:srgbClr val="0D1F3C"/>
-                </a:solidFill>
-                <a:latin typeface="Calibri"/>
+                  <a:srgbClr val="003A59"/>
+                </a:solidFill>
+                <a:latin typeface="Poppins"/>
               </a:rPr>
               <a:t>$3,497</a:t>
             </a:r>
@@ -8831,7 +8879,7 @@
                 <a:solidFill>
                   <a:srgbClr val="64748B"/>
                 </a:solidFill>
-                <a:latin typeface="Calibri"/>
+                <a:latin typeface="Poppins"/>
               </a:rPr>
               <a:t>/mo</a:t>
             </a:r>
@@ -8864,7 +8912,7 @@
                 <a:solidFill>
                   <a:srgbClr val="334155"/>
                 </a:solidFill>
-                <a:latin typeface="Calibri"/>
+                <a:latin typeface="Poppins"/>
               </a:rPr>
               <a:t>$3,797/mo</a:t>
             </a:r>
@@ -8942,7 +8990,7 @@
                 <a:solidFill>
                   <a:srgbClr val="64748B"/>
                 </a:solidFill>
-                <a:latin typeface="Calibri"/>
+                <a:latin typeface="Poppins"/>
               </a:rPr>
               <a:t>GBP fix · EN/ES site consolidation · SEO · reviews · Spanish PPC</a:t>
             </a:r>
@@ -8964,7 +9012,7 @@
             <a:avLst/>
           </a:prstGeom>
           <a:solidFill>
-            <a:srgbClr val="0D1F3C"/>
+            <a:srgbClr val="003A59"/>
           </a:solidFill>
           <a:ln>
             <a:solidFill>
@@ -9020,7 +9068,7 @@
                 <a:solidFill>
                   <a:srgbClr val="7CA0C0"/>
                 </a:solidFill>
-                <a:latin typeface="Calibri"/>
+                <a:latin typeface="Poppins"/>
               </a:rPr>
               <a:t>BUNDLE TOTAL</a:t>
             </a:r>
@@ -9051,9 +9099,9 @@
             <a:r>
               <a:rPr sz="2200" b="1" i="0">
                 <a:solidFill>
-                  <a:srgbClr val="F5C400"/>
-                </a:solidFill>
-                <a:latin typeface="Calibri"/>
+                  <a:srgbClr val="0091C9"/>
+                </a:solidFill>
+                <a:latin typeface="Poppins"/>
               </a:rPr>
               <a:t>$3,497 / mo</a:t>
             </a:r>
@@ -9086,7 +9134,7 @@
                 <a:solidFill>
                   <a:srgbClr val="7CA0C0"/>
                 </a:solidFill>
-                <a:latin typeface="Calibri"/>
+                <a:latin typeface="Poppins"/>
               </a:rPr>
               <a:t>Save $300/mo by bundling</a:t>
             </a:r>
@@ -9164,7 +9212,7 @@
                 <a:solidFill>
                   <a:srgbClr val="64748B"/>
                 </a:solidFill>
-                <a:latin typeface="Calibri"/>
+                <a:latin typeface="Poppins"/>
               </a:rPr>
               <a:t>+ Recommended ad spend: $3,000–$5,000/mo paid directly to Google/Meta</a:t>
             </a:r>
@@ -9242,7 +9290,7 @@
                 <a:solidFill>
                   <a:srgbClr val="065F46"/>
                 </a:solidFill>
-                <a:latin typeface="Calibri"/>
+                <a:latin typeface="Poppins"/>
               </a:rPr>
               <a:t>PROJECTED RETURN ON AD SPEND</a:t>
             </a:r>
@@ -9275,7 +9323,7 @@
                 <a:solidFill>
                   <a:srgbClr val="1E293B"/>
                 </a:solidFill>
-                <a:latin typeface="Calibri"/>
+                <a:latin typeface="Poppins"/>
               </a:rPr>
               <a:t>Average case value:</a:t>
             </a:r>
@@ -9308,7 +9356,7 @@
                 <a:solidFill>
                   <a:srgbClr val="065F46"/>
                 </a:solidFill>
-                <a:latin typeface="Calibri"/>
+                <a:latin typeface="Poppins"/>
               </a:rPr>
               <a:t>$30,000–$50,000+</a:t>
             </a:r>
@@ -9386,7 +9434,7 @@
                 <a:solidFill>
                   <a:srgbClr val="1E293B"/>
                 </a:solidFill>
-                <a:latin typeface="Calibri"/>
+                <a:latin typeface="Poppins"/>
               </a:rPr>
               <a:t>Conservative  (3 cases/mo):</a:t>
             </a:r>
@@ -9419,7 +9467,7 @@
                 <a:solidFill>
                   <a:srgbClr val="065F46"/>
                 </a:solidFill>
-                <a:latin typeface="Calibri"/>
+                <a:latin typeface="Poppins"/>
               </a:rPr>
               <a:t>$120,000 revenue · 40× ROAS</a:t>
             </a:r>
@@ -9452,7 +9500,7 @@
                 <a:solidFill>
                   <a:srgbClr val="1E293B"/>
                 </a:solidFill>
-                <a:latin typeface="Calibri"/>
+                <a:latin typeface="Poppins"/>
               </a:rPr>
               <a:t>Aggressive  (6–7 cases/mo):</a:t>
             </a:r>
@@ -9485,7 +9533,7 @@
                 <a:solidFill>
                   <a:srgbClr val="065F46"/>
                 </a:solidFill>
-                <a:latin typeface="Calibri"/>
+                <a:latin typeface="Poppins"/>
               </a:rPr>
               <a:t>$272,000 revenue · 54× ROAS</a:t>
             </a:r>
@@ -9516,9 +9564,9 @@
             <a:r>
               <a:rPr sz="800" b="1" i="0">
                 <a:solidFill>
-                  <a:srgbClr val="0D1F3C"/>
-                </a:solidFill>
-                <a:latin typeface="Calibri"/>
+                  <a:srgbClr val="003A59"/>
+                </a:solidFill>
+                <a:latin typeface="Poppins"/>
               </a:rPr>
               <a:t>WHAT HAPPENS IN THE FIRST 90 DAYS</a:t>
             </a:r>
@@ -9540,7 +9588,7 @@
             <a:avLst/>
           </a:prstGeom>
           <a:solidFill>
-            <a:srgbClr val="0D1F3C"/>
+            <a:srgbClr val="003A59"/>
           </a:solidFill>
           <a:ln>
             <a:solidFill>
@@ -9594,9 +9642,9 @@
             <a:r>
               <a:rPr sz="800" b="1" i="0">
                 <a:solidFill>
-                  <a:srgbClr val="0D1F3C"/>
-                </a:solidFill>
-                <a:latin typeface="Calibri"/>
+                  <a:srgbClr val="003A59"/>
+                </a:solidFill>
+                <a:latin typeface="Poppins"/>
               </a:rPr>
               <a:t>Day 1</a:t>
             </a:r>
@@ -9629,7 +9677,7 @@
                 <a:solidFill>
                   <a:srgbClr val="1E293B"/>
                 </a:solidFill>
-                <a:latin typeface="Calibri"/>
+                <a:latin typeface="Poppins"/>
               </a:rPr>
               <a:t>Launch corrected bilingual Google Ads campaigns</a:t>
             </a:r>
@@ -9651,7 +9699,7 @@
             <a:avLst/>
           </a:prstGeom>
           <a:solidFill>
-            <a:srgbClr val="0D1F3C"/>
+            <a:srgbClr val="003A59"/>
           </a:solidFill>
           <a:ln>
             <a:solidFill>
@@ -9705,9 +9753,9 @@
             <a:r>
               <a:rPr sz="800" b="1" i="0">
                 <a:solidFill>
-                  <a:srgbClr val="0D1F3C"/>
-                </a:solidFill>
-                <a:latin typeface="Calibri"/>
+                  <a:srgbClr val="003A59"/>
+                </a:solidFill>
+                <a:latin typeface="Poppins"/>
               </a:rPr>
               <a:t>Day 14</a:t>
             </a:r>
@@ -9740,7 +9788,7 @@
                 <a:solidFill>
                   <a:srgbClr val="1E293B"/>
                 </a:solidFill>
-                <a:latin typeface="Calibri"/>
+                <a:latin typeface="Poppins"/>
               </a:rPr>
               <a:t>Fix GBP category &amp; Beverly Hills address</a:t>
             </a:r>
@@ -9762,7 +9810,7 @@
             <a:avLst/>
           </a:prstGeom>
           <a:solidFill>
-            <a:srgbClr val="0D1F3C"/>
+            <a:srgbClr val="003A59"/>
           </a:solidFill>
           <a:ln>
             <a:solidFill>
@@ -9816,9 +9864,9 @@
             <a:r>
               <a:rPr sz="800" b="1" i="0">
                 <a:solidFill>
-                  <a:srgbClr val="0D1F3C"/>
-                </a:solidFill>
-                <a:latin typeface="Calibri"/>
+                  <a:srgbClr val="003A59"/>
+                </a:solidFill>
+                <a:latin typeface="Poppins"/>
               </a:rPr>
               <a:t>Week 2</a:t>
             </a:r>
@@ -9851,7 +9899,7 @@
                 <a:solidFill>
                   <a:srgbClr val="1E293B"/>
                 </a:solidFill>
-                <a:latin typeface="Calibri"/>
+                <a:latin typeface="Poppins"/>
               </a:rPr>
               <a:t>Begin EN/ES site consolidation &amp; on-page SEO</a:t>
             </a:r>
@@ -9873,7 +9921,7 @@
             <a:avLst/>
           </a:prstGeom>
           <a:solidFill>
-            <a:srgbClr val="0D1F3C"/>
+            <a:srgbClr val="003A59"/>
           </a:solidFill>
           <a:ln>
             <a:solidFill>
@@ -9927,9 +9975,9 @@
             <a:r>
               <a:rPr sz="800" b="1" i="0">
                 <a:solidFill>
-                  <a:srgbClr val="0D1F3C"/>
-                </a:solidFill>
-                <a:latin typeface="Calibri"/>
+                  <a:srgbClr val="003A59"/>
+                </a:solidFill>
+                <a:latin typeface="Poppins"/>
               </a:rPr>
               <a:t>Week 3</a:t>
             </a:r>
@@ -9962,7 +10010,7 @@
                 <a:solidFill>
                   <a:srgbClr val="1E293B"/>
                 </a:solidFill>
-                <a:latin typeface="Calibri"/>
+                <a:latin typeface="Poppins"/>
               </a:rPr>
               <a:t>Launch review generation sequence</a:t>
             </a:r>
@@ -9984,7 +10032,7 @@
             <a:avLst/>
           </a:prstGeom>
           <a:solidFill>
-            <a:srgbClr val="0D1F3C"/>
+            <a:srgbClr val="003A59"/>
           </a:solidFill>
           <a:ln>
             <a:solidFill>
@@ -10038,9 +10086,9 @@
             <a:r>
               <a:rPr sz="800" b="1" i="0">
                 <a:solidFill>
-                  <a:srgbClr val="0D1F3C"/>
-                </a:solidFill>
-                <a:latin typeface="Calibri"/>
+                  <a:srgbClr val="003A59"/>
+                </a:solidFill>
+                <a:latin typeface="Poppins"/>
               </a:rPr>
               <a:t>Month 3</a:t>
             </a:r>
@@ -10073,7 +10121,7 @@
                 <a:solidFill>
                   <a:srgbClr val="1E293B"/>
                 </a:solidFill>
-                <a:latin typeface="Calibri"/>
+                <a:latin typeface="Poppins"/>
               </a:rPr>
               <a:t>Baseline reporting on lead source &amp; conversion live</a:t>
             </a:r>
@@ -10095,7 +10143,7 @@
             <a:avLst/>
           </a:prstGeom>
           <a:solidFill>
-            <a:srgbClr val="0D1F3C"/>
+            <a:srgbClr val="003A59"/>
           </a:solidFill>
           <a:ln>
             <a:solidFill>
@@ -10151,7 +10199,7 @@
                 <a:solidFill>
                   <a:srgbClr val="8BADD0"/>
                 </a:solidFill>
-                <a:latin typeface="Calibri"/>
+                <a:latin typeface="Poppins"/>
               </a:rPr>
               <a:t>"I want a firm that keeps generating cases and taking care of clients whether or not I'm the one answering the phone that day."</a:t>
             </a:r>
@@ -10173,7 +10221,7 @@
             <a:avLst/>
           </a:prstGeom>
           <a:solidFill>
-            <a:srgbClr val="0D1F3C"/>
+            <a:srgbClr val="003A59"/>
           </a:solidFill>
           <a:ln>
             <a:solidFill>
@@ -10203,9 +10251,33 @@
           </a:p>
         </p:txBody>
       </p:sp>
-      <p:sp>
-        <p:nvSpPr>
-          <p:cNvPr id="47" name="TextBox 46"/>
+      <p:pic>
+        <p:nvPicPr>
+          <p:cNvPr id="47" name="Picture 46" descr="smb_team_logo.png"/>
+          <p:cNvPicPr>
+            <a:picLocks noChangeAspect="1"/>
+          </p:cNvPicPr>
+          <p:nvPr/>
+        </p:nvPicPr>
+        <p:blipFill>
+          <a:blip r:embed="rId2"/>
+          <a:stretch>
+            <a:fillRect/>
+          </a:stretch>
+        </p:blipFill>
+        <p:spPr>
+          <a:xfrm>
+            <a:off x="201168" y="4837176"/>
+            <a:ext cx="1170432" cy="237744"/>
+          </a:xfrm>
+          <a:prstGeom prst="rect">
+            <a:avLst/>
+          </a:prstGeom>
+        </p:spPr>
+      </p:pic>
+      <p:sp>
+        <p:nvSpPr>
+          <p:cNvPr id="48" name="TextBox 47"/>
           <p:cNvSpPr txBox="1"/>
           <p:nvPr/>
         </p:nvSpPr>
@@ -10229,7 +10301,7 @@
                 <a:solidFill>
                   <a:srgbClr val="5A7A9A"/>
                 </a:solidFill>
-                <a:latin typeface="Calibri"/>
+                <a:latin typeface="Poppins"/>
               </a:rPr>
               <a:t>CONFIDENTIAL  ·  Prepared by Dan Bryant | SMB Team</a:t>
             </a:r>
@@ -10238,7 +10310,7 @@
       </p:sp>
       <p:sp>
         <p:nvSpPr>
-          <p:cNvPr id="48" name="TextBox 47"/>
+          <p:cNvPr id="49" name="TextBox 48"/>
           <p:cNvSpPr txBox="1"/>
           <p:nvPr/>
         </p:nvSpPr>
@@ -10262,7 +10334,7 @@
                 <a:solidFill>
                   <a:srgbClr val="5A7A9A"/>
                 </a:solidFill>
-                <a:latin typeface="Calibri"/>
+                <a:latin typeface="Poppins"/>
               </a:rPr>
               <a:t>3 / 3</a:t>
             </a:r>
